--- a/media/exports/nfp-sample-statements.pptx
+++ b/media/exports/nfp-sample-statements.pptx
@@ -5469,38 +5469,6 @@
               <a:t>September 2026: Locked. September 2026 is locked (closed 2 Oct 2026). These numbers won't change.</a:t>
             </a:r>
           </a:p>
-          <a:p>
-            <a:pPr>
-              <a:defRPr>
-                <a:latin typeface="Roboto"/>
-              </a:defRPr>
-            </a:pPr>
-            <a:r>
-              <a:rPr sz="1100" b="0">
-                <a:solidFill>
-                  <a:srgbClr val="5F6F63"/>
-                </a:solidFill>
-                <a:latin typeface="Roboto"/>
-              </a:rPr>
-              <a:t>August 2026: Locked. August 2026 is locked (closed 2 Sep 2026). These numbers won't change.</a:t>
-            </a:r>
-          </a:p>
-          <a:p>
-            <a:pPr>
-              <a:defRPr>
-                <a:latin typeface="Roboto"/>
-              </a:defRPr>
-            </a:pPr>
-            <a:r>
-              <a:rPr sz="1100" b="0">
-                <a:solidFill>
-                  <a:srgbClr val="5F6F63"/>
-                </a:solidFill>
-                <a:latin typeface="Roboto"/>
-              </a:rPr>
-              <a:t>October 2026: Incomplete. October 2026 is still in progress: figures to 6 Oct only.</a:t>
-            </a:r>
-          </a:p>
         </p:txBody>
       </p:sp>
       <p:sp>
@@ -5576,7 +5544,7 @@
                 </a:solidFill>
                 <a:latin typeface="Roboto"/>
               </a:rPr>
-              <a:t>Data retrieved 2pm, Tue 6 Oct 2026 · Generated 9 Oct 2026, 8:56am · Sample data · Made with Python (python-pptx)</a:t>
+              <a:t>Data retrieved 2pm, Tue 6 Oct 2026 · Generated 22 Oct 2026, 4:57pm · Sample data · Made with Python (python-pptx)</a:t>
             </a:r>
           </a:p>
         </p:txBody>
@@ -7512,7 +7480,7 @@
                 </a:solidFill>
                 <a:latin typeface="Roboto"/>
               </a:rPr>
-              <a:t>Data retrieved 2pm, Tue 6 Oct 2026 · Generated 9 Oct 2026, 8:56am · Sample data · Made with Python (python-pptx)</a:t>
+              <a:t>Data retrieved 2pm, Tue 6 Oct 2026 · Generated 22 Oct 2026, 4:57pm · Sample data · Made with Python (python-pptx)</a:t>
             </a:r>
           </a:p>
         </p:txBody>
@@ -8238,7 +8206,7 @@
                 </a:solidFill>
                 <a:latin typeface="Roboto"/>
               </a:rPr>
-              <a:t>Data retrieved 2pm, Tue 6 Oct 2026 · Generated 9 Oct 2026, 8:56am · Sample data · Made with Python (python-pptx)</a:t>
+              <a:t>Data retrieved 2pm, Tue 6 Oct 2026 · Generated 22 Oct 2026, 4:57pm · Sample data · Made with Python (python-pptx)</a:t>
             </a:r>
           </a:p>
         </p:txBody>
@@ -10064,7 +10032,7 @@
                 </a:solidFill>
                 <a:latin typeface="Roboto"/>
               </a:rPr>
-              <a:t>Data retrieved 2pm, Tue 6 Oct 2026 · Generated 9 Oct 2026, 8:56am · Sample data · Made with Python (python-pptx)</a:t>
+              <a:t>Data retrieved 2pm, Tue 6 Oct 2026 · Generated 22 Oct 2026, 4:57pm · Sample data · Made with Python (python-pptx)</a:t>
             </a:r>
           </a:p>
         </p:txBody>
@@ -12830,7 +12798,7 @@
                 </a:solidFill>
                 <a:latin typeface="Roboto"/>
               </a:rPr>
-              <a:t>Data retrieved 2pm, Tue 6 Oct 2026 · Generated 9 Oct 2026, 8:56am · Sample data · Made with Python (python-pptx)</a:t>
+              <a:t>Data retrieved 2pm, Tue 6 Oct 2026 · Generated 22 Oct 2026, 4:57pm · Sample data · Made with Python (python-pptx)</a:t>
             </a:r>
           </a:p>
         </p:txBody>
@@ -13282,7 +13250,7 @@
                 </a:solidFill>
                 <a:latin typeface="Roboto"/>
               </a:rPr>
-              <a:t>Data retrieved 2pm, Tue 6 Oct 2026 · Generated 9 Oct 2026, 8:56am · Sample data · Made with Python (python-pptx)</a:t>
+              <a:t>Data retrieved 2pm, Tue 6 Oct 2026 · Generated 22 Oct 2026, 4:57pm · Sample data · Made with Python (python-pptx)</a:t>
             </a:r>
           </a:p>
         </p:txBody>
@@ -14014,7 +13982,7 @@
                 </a:solidFill>
                 <a:latin typeface="Roboto"/>
               </a:rPr>
-              <a:t>Data retrieved 2pm, Tue 6 Oct 2026 · Generated 9 Oct 2026, 8:56am · Sample data · Made with Python (python-pptx)</a:t>
+              <a:t>Data retrieved 2pm, Tue 6 Oct 2026 · Generated 22 Oct 2026, 4:57pm · Sample data · Made with Python (python-pptx)</a:t>
             </a:r>
           </a:p>
         </p:txBody>
@@ -14522,7 +14490,7 @@
                 </a:solidFill>
                 <a:latin typeface="Roboto"/>
               </a:rPr>
-              <a:t>Data retrieved 2pm, Tue 6 Oct 2026 · Generated 9 Oct 2026, 8:56am · Sample data · Made with Python (python-pptx)</a:t>
+              <a:t>Data retrieved 2pm, Tue 6 Oct 2026 · Generated 22 Oct 2026, 4:57pm · Sample data · Made with Python (python-pptx)</a:t>
             </a:r>
           </a:p>
         </p:txBody>
@@ -15030,7 +14998,7 @@
                 </a:solidFill>
                 <a:latin typeface="Roboto"/>
               </a:rPr>
-              <a:t>Data retrieved 2pm, Tue 6 Oct 2026 · Generated 9 Oct 2026, 8:56am · Sample data · Made with Python (python-pptx)</a:t>
+              <a:t>Data retrieved 2pm, Tue 6 Oct 2026 · Generated 22 Oct 2026, 4:57pm · Sample data · Made with Python (python-pptx)</a:t>
             </a:r>
           </a:p>
         </p:txBody>
@@ -15874,7 +15842,7 @@
                 </a:solidFill>
                 <a:latin typeface="Roboto"/>
               </a:rPr>
-              <a:t>Data retrieved 2pm, Tue 6 Oct 2026 · Generated 9 Oct 2026, 8:56am · Sample data · Made with Python (python-pptx)</a:t>
+              <a:t>Data retrieved 2pm, Tue 6 Oct 2026 · Generated 22 Oct 2026, 4:57pm · Sample data · Made with Python (python-pptx)</a:t>
             </a:r>
           </a:p>
         </p:txBody>
@@ -16630,7 +16598,7 @@
                 </a:solidFill>
                 <a:latin typeface="Roboto"/>
               </a:rPr>
-              <a:t>Data retrieved 2pm, Tue 6 Oct 2026 · Generated 9 Oct 2026, 8:56am · Sample data · Made with Python (python-pptx)</a:t>
+              <a:t>Data retrieved 2pm, Tue 6 Oct 2026 · Generated 22 Oct 2026, 4:57pm · Sample data · Made with Python (python-pptx)</a:t>
             </a:r>
           </a:p>
         </p:txBody>
@@ -16945,7 +16913,7 @@
                 </a:solidFill>
                 <a:latin typeface="Roboto"/>
               </a:rPr>
-              <a:t>Data retrieved 2pm, Tue 6 Oct 2026 · Generated 9 Oct 2026, 8:56am · Sample data · Made with Python (python-pptx)</a:t>
+              <a:t>Data retrieved 2pm, Tue 6 Oct 2026 · Generated 22 Oct 2026, 4:57pm · Sample data · Made with Python (python-pptx)</a:t>
             </a:r>
           </a:p>
         </p:txBody>
@@ -17260,7 +17228,7 @@
                 </a:solidFill>
                 <a:latin typeface="Roboto"/>
               </a:rPr>
-              <a:t>Data retrieved 2pm, Tue 6 Oct 2026 · Generated 9 Oct 2026, 8:56am · Sample data · Made with Python (python-pptx)</a:t>
+              <a:t>Data retrieved 2pm, Tue 6 Oct 2026 · Generated 22 Oct 2026, 4:57pm · Sample data · Made with Python (python-pptx)</a:t>
             </a:r>
           </a:p>
         </p:txBody>
@@ -18405,7 +18373,7 @@
                 </a:solidFill>
                 <a:latin typeface="Roboto"/>
               </a:rPr>
-              <a:t>Data retrieved 2pm, Tue 6 Oct 2026 · Generated 9 Oct 2026, 8:56am · Sample data · Made with Python (python-pptx)</a:t>
+              <a:t>Data retrieved 2pm, Tue 6 Oct 2026 · Generated 22 Oct 2026, 4:57pm · Sample data · Made with Python (python-pptx)</a:t>
             </a:r>
           </a:p>
         </p:txBody>
@@ -19301,7 +19269,7 @@
                 </a:solidFill>
                 <a:latin typeface="Roboto"/>
               </a:rPr>
-              <a:t>Data retrieved 2pm, Tue 6 Oct 2026 · Generated 9 Oct 2026, 8:56am · Sample data · Made with Python (python-pptx)</a:t>
+              <a:t>Data retrieved 2pm, Tue 6 Oct 2026 · Generated 22 Oct 2026, 4:57pm · Sample data · Made with Python (python-pptx)</a:t>
             </a:r>
           </a:p>
         </p:txBody>
@@ -19951,7 +19919,7 @@
                 </a:solidFill>
                 <a:latin typeface="Roboto"/>
               </a:rPr>
-              <a:t>Data retrieved 2pm, Tue 6 Oct 2026 · Generated 9 Oct 2026, 8:56am · Sample data · Made with Python (python-pptx)</a:t>
+              <a:t>Data retrieved 2pm, Tue 6 Oct 2026 · Generated 22 Oct 2026, 4:57pm · Sample data · Made with Python (python-pptx)</a:t>
             </a:r>
           </a:p>
         </p:txBody>
@@ -21887,7 +21855,7 @@
                 </a:solidFill>
                 <a:latin typeface="Roboto"/>
               </a:rPr>
-              <a:t>Data retrieved 2pm, Tue 6 Oct 2026 · Generated 9 Oct 2026, 8:56am · Sample data · Made with Python (python-pptx)</a:t>
+              <a:t>Data retrieved 2pm, Tue 6 Oct 2026 · Generated 22 Oct 2026, 4:57pm · Sample data · Made with Python (python-pptx)</a:t>
             </a:r>
           </a:p>
         </p:txBody>
@@ -23713,7 +23681,7 @@
                 </a:solidFill>
                 <a:latin typeface="Roboto"/>
               </a:rPr>
-              <a:t>Data retrieved 2pm, Tue 6 Oct 2026 · Generated 9 Oct 2026, 8:56am · Sample data · Made with Python (python-pptx)</a:t>
+              <a:t>Data retrieved 2pm, Tue 6 Oct 2026 · Generated 22 Oct 2026, 4:57pm · Sample data · Made with Python (python-pptx)</a:t>
             </a:r>
           </a:p>
         </p:txBody>

--- a/media/exports/nfp-sample-statements.pptx
+++ b/media/exports/nfp-sample-statements.pptx
@@ -5204,62 +5204,30 @@
           </a:p>
         </p:txBody>
       </p:sp>
-      <p:sp>
-        <p:nvSpPr>
-          <p:cNvPr id="3" name="Rectangle 2"/>
-          <p:cNvSpPr/>
+      <p:pic>
+        <p:nvPicPr>
+          <p:cNvPr id="3" name="Picture 2" descr="mark-4th-180.png"/>
+          <p:cNvPicPr>
+            <a:picLocks noChangeAspect="1"/>
+          </p:cNvPicPr>
           <p:nvPr/>
-        </p:nvSpPr>
+        </p:nvPicPr>
+        <p:blipFill>
+          <a:blip r:embed="rId2"/>
+          <a:stretch>
+            <a:fillRect/>
+          </a:stretch>
+        </p:blipFill>
         <p:spPr>
           <a:xfrm>
-            <a:off x="457200" y="548640"/>
-            <a:ext cx="640080" cy="640080"/>
+            <a:off x="365760" y="457200"/>
+            <a:ext cx="822960" cy="822960"/>
           </a:xfrm>
           <a:prstGeom prst="rect">
             <a:avLst/>
           </a:prstGeom>
-          <a:solidFill>
-            <a:srgbClr val="2F7A5D"/>
-          </a:solidFill>
-          <a:ln>
-            <a:noFill/>
-          </a:ln>
         </p:spPr>
-        <p:style>
-          <a:lnRef idx="1">
-            <a:schemeClr val="accent1"/>
-          </a:lnRef>
-          <a:fillRef idx="3">
-            <a:schemeClr val="accent1"/>
-          </a:fillRef>
-          <a:effectRef idx="2">
-            <a:schemeClr val="accent1"/>
-          </a:effectRef>
-          <a:fontRef idx="minor">
-            <a:schemeClr val="lt1"/>
-          </a:fontRef>
-        </p:style>
-        <p:txBody>
-          <a:bodyPr rtlCol="0" anchor="ctr"/>
-          <a:lstStyle/>
-          <a:p>
-            <a:pPr>
-              <a:defRPr>
-                <a:latin typeface="Roboto"/>
-              </a:defRPr>
-            </a:pPr>
-            <a:r>
-              <a:rPr sz="1600" b="1">
-                <a:solidFill>
-                  <a:srgbClr val="FFFFFF"/>
-                </a:solidFill>
-                <a:latin typeface="Roboto"/>
-              </a:rPr>
-              <a:t>4th</a:t>
-            </a:r>
-          </a:p>
-        </p:txBody>
-      </p:sp>
+      </p:pic>
       <p:sp>
         <p:nvSpPr>
           <p:cNvPr id="4" name="TextBox 3"/>
@@ -5544,7 +5512,7 @@
                 </a:solidFill>
                 <a:latin typeface="Roboto"/>
               </a:rPr>
-              <a:t>Data retrieved 2pm, Tue 6 Oct 2026 · Generated 22 Oct 2026, 4:57pm · Sample data · Made with Python (python-pptx)</a:t>
+              <a:t>Data retrieved 2pm, Tue 6 Oct 2026 · Generated 28 Oct 2026, 12:45pm · Sample data · Made with Python (python-pptx)</a:t>
             </a:r>
           </a:p>
         </p:txBody>
@@ -7480,7 +7448,7 @@
                 </a:solidFill>
                 <a:latin typeface="Roboto"/>
               </a:rPr>
-              <a:t>Data retrieved 2pm, Tue 6 Oct 2026 · Generated 22 Oct 2026, 4:57pm · Sample data · Made with Python (python-pptx)</a:t>
+              <a:t>Data retrieved 2pm, Tue 6 Oct 2026 · Generated 28 Oct 2026, 12:45pm · Sample data · Made with Python (python-pptx)</a:t>
             </a:r>
           </a:p>
         </p:txBody>
@@ -8206,7 +8174,7 @@
                 </a:solidFill>
                 <a:latin typeface="Roboto"/>
               </a:rPr>
-              <a:t>Data retrieved 2pm, Tue 6 Oct 2026 · Generated 22 Oct 2026, 4:57pm · Sample data · Made with Python (python-pptx)</a:t>
+              <a:t>Data retrieved 2pm, Tue 6 Oct 2026 · Generated 28 Oct 2026, 12:45pm · Sample data · Made with Python (python-pptx)</a:t>
             </a:r>
           </a:p>
         </p:txBody>
@@ -10032,7 +10000,7 @@
                 </a:solidFill>
                 <a:latin typeface="Roboto"/>
               </a:rPr>
-              <a:t>Data retrieved 2pm, Tue 6 Oct 2026 · Generated 22 Oct 2026, 4:57pm · Sample data · Made with Python (python-pptx)</a:t>
+              <a:t>Data retrieved 2pm, Tue 6 Oct 2026 · Generated 28 Oct 2026, 12:45pm · Sample data · Made with Python (python-pptx)</a:t>
             </a:r>
           </a:p>
         </p:txBody>
@@ -12798,7 +12766,7 @@
                 </a:solidFill>
                 <a:latin typeface="Roboto"/>
               </a:rPr>
-              <a:t>Data retrieved 2pm, Tue 6 Oct 2026 · Generated 22 Oct 2026, 4:57pm · Sample data · Made with Python (python-pptx)</a:t>
+              <a:t>Data retrieved 2pm, Tue 6 Oct 2026 · Generated 28 Oct 2026, 12:45pm · Sample data · Made with Python (python-pptx)</a:t>
             </a:r>
           </a:p>
         </p:txBody>
@@ -13250,7 +13218,7 @@
                 </a:solidFill>
                 <a:latin typeface="Roboto"/>
               </a:rPr>
-              <a:t>Data retrieved 2pm, Tue 6 Oct 2026 · Generated 22 Oct 2026, 4:57pm · Sample data · Made with Python (python-pptx)</a:t>
+              <a:t>Data retrieved 2pm, Tue 6 Oct 2026 · Generated 28 Oct 2026, 12:45pm · Sample data · Made with Python (python-pptx)</a:t>
             </a:r>
           </a:p>
         </p:txBody>
@@ -13982,7 +13950,7 @@
                 </a:solidFill>
                 <a:latin typeface="Roboto"/>
               </a:rPr>
-              <a:t>Data retrieved 2pm, Tue 6 Oct 2026 · Generated 22 Oct 2026, 4:57pm · Sample data · Made with Python (python-pptx)</a:t>
+              <a:t>Data retrieved 2pm, Tue 6 Oct 2026 · Generated 28 Oct 2026, 12:45pm · Sample data · Made with Python (python-pptx)</a:t>
             </a:r>
           </a:p>
         </p:txBody>
@@ -14490,7 +14458,7 @@
                 </a:solidFill>
                 <a:latin typeface="Roboto"/>
               </a:rPr>
-              <a:t>Data retrieved 2pm, Tue 6 Oct 2026 · Generated 22 Oct 2026, 4:57pm · Sample data · Made with Python (python-pptx)</a:t>
+              <a:t>Data retrieved 2pm, Tue 6 Oct 2026 · Generated 28 Oct 2026, 12:45pm · Sample data · Made with Python (python-pptx)</a:t>
             </a:r>
           </a:p>
         </p:txBody>
@@ -14998,7 +14966,7 @@
                 </a:solidFill>
                 <a:latin typeface="Roboto"/>
               </a:rPr>
-              <a:t>Data retrieved 2pm, Tue 6 Oct 2026 · Generated 22 Oct 2026, 4:57pm · Sample data · Made with Python (python-pptx)</a:t>
+              <a:t>Data retrieved 2pm, Tue 6 Oct 2026 · Generated 28 Oct 2026, 12:45pm · Sample data · Made with Python (python-pptx)</a:t>
             </a:r>
           </a:p>
         </p:txBody>
@@ -15842,7 +15810,7 @@
                 </a:solidFill>
                 <a:latin typeface="Roboto"/>
               </a:rPr>
-              <a:t>Data retrieved 2pm, Tue 6 Oct 2026 · Generated 22 Oct 2026, 4:57pm · Sample data · Made with Python (python-pptx)</a:t>
+              <a:t>Data retrieved 2pm, Tue 6 Oct 2026 · Generated 28 Oct 2026, 12:45pm · Sample data · Made with Python (python-pptx)</a:t>
             </a:r>
           </a:p>
         </p:txBody>
@@ -16598,7 +16566,7 @@
                 </a:solidFill>
                 <a:latin typeface="Roboto"/>
               </a:rPr>
-              <a:t>Data retrieved 2pm, Tue 6 Oct 2026 · Generated 22 Oct 2026, 4:57pm · Sample data · Made with Python (python-pptx)</a:t>
+              <a:t>Data retrieved 2pm, Tue 6 Oct 2026 · Generated 28 Oct 2026, 12:45pm · Sample data · Made with Python (python-pptx)</a:t>
             </a:r>
           </a:p>
         </p:txBody>
@@ -16913,7 +16881,7 @@
                 </a:solidFill>
                 <a:latin typeface="Roboto"/>
               </a:rPr>
-              <a:t>Data retrieved 2pm, Tue 6 Oct 2026 · Generated 22 Oct 2026, 4:57pm · Sample data · Made with Python (python-pptx)</a:t>
+              <a:t>Data retrieved 2pm, Tue 6 Oct 2026 · Generated 28 Oct 2026, 12:45pm · Sample data · Made with Python (python-pptx)</a:t>
             </a:r>
           </a:p>
         </p:txBody>
@@ -17228,7 +17196,7 @@
                 </a:solidFill>
                 <a:latin typeface="Roboto"/>
               </a:rPr>
-              <a:t>Data retrieved 2pm, Tue 6 Oct 2026 · Generated 22 Oct 2026, 4:57pm · Sample data · Made with Python (python-pptx)</a:t>
+              <a:t>Data retrieved 2pm, Tue 6 Oct 2026 · Generated 28 Oct 2026, 12:45pm · Sample data · Made with Python (python-pptx)</a:t>
             </a:r>
           </a:p>
         </p:txBody>
@@ -18373,7 +18341,7 @@
                 </a:solidFill>
                 <a:latin typeface="Roboto"/>
               </a:rPr>
-              <a:t>Data retrieved 2pm, Tue 6 Oct 2026 · Generated 22 Oct 2026, 4:57pm · Sample data · Made with Python (python-pptx)</a:t>
+              <a:t>Data retrieved 2pm, Tue 6 Oct 2026 · Generated 28 Oct 2026, 12:45pm · Sample data · Made with Python (python-pptx)</a:t>
             </a:r>
           </a:p>
         </p:txBody>
@@ -19269,7 +19237,7 @@
                 </a:solidFill>
                 <a:latin typeface="Roboto"/>
               </a:rPr>
-              <a:t>Data retrieved 2pm, Tue 6 Oct 2026 · Generated 22 Oct 2026, 4:57pm · Sample data · Made with Python (python-pptx)</a:t>
+              <a:t>Data retrieved 2pm, Tue 6 Oct 2026 · Generated 28 Oct 2026, 12:45pm · Sample data · Made with Python (python-pptx)</a:t>
             </a:r>
           </a:p>
         </p:txBody>
@@ -19919,7 +19887,7 @@
                 </a:solidFill>
                 <a:latin typeface="Roboto"/>
               </a:rPr>
-              <a:t>Data retrieved 2pm, Tue 6 Oct 2026 · Generated 22 Oct 2026, 4:57pm · Sample data · Made with Python (python-pptx)</a:t>
+              <a:t>Data retrieved 2pm, Tue 6 Oct 2026 · Generated 28 Oct 2026, 12:45pm · Sample data · Made with Python (python-pptx)</a:t>
             </a:r>
           </a:p>
         </p:txBody>
@@ -21855,7 +21823,7 @@
                 </a:solidFill>
                 <a:latin typeface="Roboto"/>
               </a:rPr>
-              <a:t>Data retrieved 2pm, Tue 6 Oct 2026 · Generated 22 Oct 2026, 4:57pm · Sample data · Made with Python (python-pptx)</a:t>
+              <a:t>Data retrieved 2pm, Tue 6 Oct 2026 · Generated 28 Oct 2026, 12:45pm · Sample data · Made with Python (python-pptx)</a:t>
             </a:r>
           </a:p>
         </p:txBody>
@@ -23681,7 +23649,7 @@
                 </a:solidFill>
                 <a:latin typeface="Roboto"/>
               </a:rPr>
-              <a:t>Data retrieved 2pm, Tue 6 Oct 2026 · Generated 22 Oct 2026, 4:57pm · Sample data · Made with Python (python-pptx)</a:t>
+              <a:t>Data retrieved 2pm, Tue 6 Oct 2026 · Generated 28 Oct 2026, 12:45pm · Sample data · Made with Python (python-pptx)</a:t>
             </a:r>
           </a:p>
         </p:txBody>
